--- a/slides/pptx/week19.pptx
+++ b/slides/pptx/week19.pptx
@@ -683,7 +683,7 @@
           <a:p>
             <a:r>
               <a:rPr lang="en-US" dirty="0"/>
-              <a:t>Run from ctf.md + exams/item-bank.md (CTF pool, incl. the boss chain). Dynamic scoring + first-blood bonus on CTFd; announce first-bloods aloud for hype. Prizes for top Houses.</a:t>
+              <a:t>Run from ctf.md (graded, 12 challenges/150 pts) + exams/item-bank.md (CTF pool, incl. the boss chain). CTFd's live board runs more challenges at different point values for engagement/leaderboard — that scoreboard is NOT the grade; ctf.md's submission is. Dynamic scoring + first-blood bonus on CTFd; announce first-bloods aloud for hype. Prizes for top Houses.</a:t>
             </a:r>
             <a:endParaRPr lang="en-US" dirty="0"/>
           </a:p>
@@ -771,7 +771,7 @@
           <a:p>
             <a:r>
               <a:rPr lang="en-US" dirty="0"/>
-              <a:t>Graded on the project rubric (project/README.md) + the peer-contribution multiplier. Strict 15-min slots. Score live on the rubric; ask one probing Q each (viva-style) to confirm the work is theirs.</a:t>
+              <a:t>Format change (2026-07-26): with N≈80–120 students in teams of 2–3, a 10-min-demo+5-min-Q&amp;A live format needs far more than the 90 minutes this block has — it cannot physically run. Video is graded beforehand on the project rubric (project/README.md) + peer-contribution multiplier; the live slot is a short viva-style Q&amp;A only, to confirm the work is theirs — not a re-demo.</a:t>
             </a:r>
             <a:endParaRPr lang="en-US" dirty="0"/>
           </a:p>
@@ -859,7 +859,7 @@
           <a:p>
             <a:r>
               <a:rPr lang="en-US" dirty="0"/>
-              <a:t>Checklist — anything missing costs rubric points. Confirm the CI pipeline actually fails on a finding (don't take their word; have them show it).</a:t>
+              <a:t>Checklist — anything missing costs rubric points. Confirm the CI pipeline actually fails on a finding (don't take their word; have them show it in the video).</a:t>
             </a:r>
             <a:endParaRPr lang="en-US" dirty="0"/>
           </a:p>
@@ -1654,7 +1654,7 @@
         <p:spPr>
           <a:xfrm>
             <a:off x="1051560" y="1325880"/>
-            <a:ext cx="7589520" cy="384048"/>
+            <a:ext cx="7589520" cy="402336"/>
           </a:xfrm>
           <a:prstGeom prst="rect">
             <a:avLst/>
@@ -1663,7 +1663,9 @@
           <a:ln/>
         </p:spPr>
         <p:txBody>
-          <a:bodyPr wrap="square" lIns="0" tIns="0" rIns="0" bIns="0" rtlCol="0" anchor="ctr"/>
+          <a:bodyPr wrap="square" lIns="0" tIns="0" rIns="0" bIns="0" rtlCol="0" anchor="ctr">
+            <a:normAutofit/>
+          </a:bodyPr>
           <a:lstStyle/>
           <a:p>
             <a:pPr indent="0" marL="0">
@@ -1692,7 +1694,7 @@
         </p:nvSpPr>
         <p:spPr>
           <a:xfrm>
-            <a:off x="502920" y="1783080"/>
+            <a:off x="502920" y="1801368"/>
             <a:ext cx="384048" cy="384048"/>
           </a:xfrm>
           <a:prstGeom prst="ellipse">
@@ -1712,7 +1714,7 @@
         </p:nvSpPr>
         <p:spPr>
           <a:xfrm>
-            <a:off x="502920" y="1783080"/>
+            <a:off x="502920" y="1801368"/>
             <a:ext cx="384048" cy="384048"/>
           </a:xfrm>
           <a:prstGeom prst="rect">
@@ -1751,8 +1753,8 @@
         </p:nvSpPr>
         <p:spPr>
           <a:xfrm>
-            <a:off x="1051560" y="1783080"/>
-            <a:ext cx="7589520" cy="384048"/>
+            <a:off x="1051560" y="1801368"/>
+            <a:ext cx="7589520" cy="402336"/>
           </a:xfrm>
           <a:prstGeom prst="rect">
             <a:avLst/>
@@ -1761,7 +1763,9 @@
           <a:ln/>
         </p:spPr>
         <p:txBody>
-          <a:bodyPr wrap="square" lIns="0" tIns="0" rIns="0" bIns="0" rtlCol="0" anchor="ctr"/>
+          <a:bodyPr wrap="square" lIns="0" tIns="0" rIns="0" bIns="0" rtlCol="0" anchor="ctr">
+            <a:normAutofit/>
+          </a:bodyPr>
           <a:lstStyle/>
           <a:p>
             <a:pPr indent="0" marL="0">
@@ -1976,11 +1980,11 @@
         <p:spPr>
           <a:xfrm>
             <a:off x="457200" y="1325880"/>
-            <a:ext cx="8229600" cy="1207008"/>
+            <a:ext cx="8229600" cy="1609344"/>
           </a:xfrm>
           <a:prstGeom prst="roundRect">
             <a:avLst>
-              <a:gd name="adj" fmla="val 6061"/>
+              <a:gd name="adj" fmla="val 4545"/>
             </a:avLst>
           </a:prstGeom>
           <a:solidFill>
@@ -2005,7 +2009,7 @@
         <p:spPr>
           <a:xfrm>
             <a:off x="731520" y="1435608"/>
-            <a:ext cx="7680960" cy="987552"/>
+            <a:ext cx="7680960" cy="1389888"/>
           </a:xfrm>
           <a:prstGeom prst="rect">
             <a:avLst/>
@@ -2014,7 +2018,9 @@
           <a:ln/>
         </p:spPr>
         <p:txBody>
-          <a:bodyPr wrap="square" lIns="0" tIns="0" rIns="0" bIns="0" rtlCol="0" anchor="t"/>
+          <a:bodyPr wrap="square" lIns="0" tIns="0" rIns="0" bIns="0" rtlCol="0" anchor="t">
+            <a:normAutofit/>
+          </a:bodyPr>
           <a:lstStyle/>
           <a:p>
             <a:pPr marL="342900" indent="-342900">
@@ -2054,7 +2060,7 @@
                 <a:ea typeface="Calibri" pitchFamily="34" charset="-122"/>
                 <a:cs typeface="Calibri" pitchFamily="34" charset="-120"/>
               </a:rPr>
-              <a:t>Team leaderboard, prizes</a:t>
+              <a:t>Team leaderboard, prizes — the live CTFd board (bigger, includes bonus/boss challenges)</a:t>
             </a:r>
             <a:endParaRPr lang="en-US" sz="1400" dirty="0"/>
           </a:p>
@@ -2075,7 +2081,7 @@
                 <a:ea typeface="Calibri" pitchFamily="34" charset="-122"/>
                 <a:cs typeface="Calibri" pitchFamily="34" charset="-120"/>
               </a:rPr>
-              <a:t>Flags = points</a:t>
+              <a:t>Graded score comes from the paper trail: flag/proof + payload + one-line mitigation per challenge</a:t>
             </a:r>
             <a:endParaRPr lang="en-US" sz="1400" dirty="0"/>
           </a:p>
@@ -2284,7 +2290,9 @@
           <a:ln/>
         </p:spPr>
         <p:txBody>
-          <a:bodyPr wrap="square" lIns="0" tIns="0" rIns="0" bIns="0" rtlCol="0" anchor="t"/>
+          <a:bodyPr wrap="square" lIns="0" tIns="0" rIns="0" bIns="0" rtlCol="0" anchor="t">
+            <a:normAutofit/>
+          </a:bodyPr>
           <a:lstStyle/>
           <a:p>
             <a:pPr indent="0" marL="0">
@@ -2314,11 +2322,11 @@
         <p:spPr>
           <a:xfrm>
             <a:off x="457200" y="1965960"/>
-            <a:ext cx="8229600" cy="1517904"/>
+            <a:ext cx="8229600" cy="2029968"/>
           </a:xfrm>
           <a:prstGeom prst="roundRect">
             <a:avLst>
-              <a:gd name="adj" fmla="val 4819"/>
+              <a:gd name="adj" fmla="val 3604"/>
             </a:avLst>
           </a:prstGeom>
           <a:solidFill>
@@ -2343,7 +2351,7 @@
         <p:spPr>
           <a:xfrm>
             <a:off x="731520" y="2075688"/>
-            <a:ext cx="7680960" cy="1298448"/>
+            <a:ext cx="7680960" cy="1810512"/>
           </a:xfrm>
           <a:prstGeom prst="rect">
             <a:avLst/>
@@ -2352,7 +2360,9 @@
           <a:ln/>
         </p:spPr>
         <p:txBody>
-          <a:bodyPr wrap="square" lIns="0" tIns="0" rIns="0" bIns="0" rtlCol="0" anchor="t"/>
+          <a:bodyPr wrap="square" lIns="0" tIns="0" rIns="0" bIns="0" rtlCol="0" anchor="t">
+            <a:normAutofit/>
+          </a:bodyPr>
           <a:lstStyle/>
           <a:p>
             <a:pPr marL="342900" indent="-342900">
@@ -2434,7 +2444,28 @@
                 <a:ea typeface="Calibri" pitchFamily="34" charset="-122"/>
                 <a:cs typeface="Calibri" pitchFamily="34" charset="-120"/>
               </a:rPr>
-              <a:t>10-min demo + 5-min Q&amp;A</a:t>
+              <a:t>Submit a recorded video walkthrough before the session — graded asynchronously on the rubric</a:t>
+            </a:r>
+            <a:endParaRPr lang="en-US" sz="1400" dirty="0"/>
+          </a:p>
+          <a:p>
+            <a:pPr marL="342900" indent="-342900">
+              <a:spcAft>
+                <a:spcPts val="600"/>
+              </a:spcAft>
+              <a:buSzPct val="100000"/>
+              <a:buChar char="•"/>
+            </a:pPr>
+            <a:r>
+              <a:rPr lang="en-US" sz="1400" dirty="0">
+                <a:solidFill>
+                  <a:srgbClr val="1F2937"/>
+                </a:solidFill>
+                <a:latin typeface="Calibri" pitchFamily="34" charset="0"/>
+                <a:ea typeface="Calibri" pitchFamily="34" charset="-122"/>
+                <a:cs typeface="Calibri" pitchFamily="34" charset="-120"/>
+              </a:rPr>
+              <a:t>3-min live Q&amp;A per team on the day (not a live demo slot)</a:t>
             </a:r>
             <a:endParaRPr lang="en-US" sz="1400" dirty="0"/>
           </a:p>
@@ -2634,11 +2665,11 @@
         <p:spPr>
           <a:xfrm>
             <a:off x="457200" y="1325880"/>
-            <a:ext cx="8229600" cy="896112"/>
+            <a:ext cx="8229600" cy="1207008"/>
           </a:xfrm>
           <a:prstGeom prst="roundRect">
             <a:avLst>
-              <a:gd name="adj" fmla="val 8163"/>
+              <a:gd name="adj" fmla="val 6061"/>
             </a:avLst>
           </a:prstGeom>
           <a:solidFill>
@@ -2663,7 +2694,7 @@
         <p:spPr>
           <a:xfrm>
             <a:off x="731520" y="1435608"/>
-            <a:ext cx="7680960" cy="676656"/>
+            <a:ext cx="7680960" cy="987552"/>
           </a:xfrm>
           <a:prstGeom prst="rect">
             <a:avLst/>
@@ -2672,8 +2703,31 @@
           <a:ln/>
         </p:spPr>
         <p:txBody>
-          <a:bodyPr wrap="square" lIns="0" tIns="0" rIns="0" bIns="0" rtlCol="0" anchor="t"/>
-          <a:lstStyle/>
+          <a:bodyPr wrap="square" lIns="0" tIns="0" rIns="0" bIns="0" rtlCol="0" anchor="t">
+            <a:normAutofit/>
+          </a:bodyPr>
+          <a:lstStyle/>
+          <a:p>
+            <a:pPr marL="342900" indent="-342900">
+              <a:spcAft>
+                <a:spcPts val="600"/>
+              </a:spcAft>
+              <a:buSzPct val="100000"/>
+              <a:buChar char="•"/>
+            </a:pPr>
+            <a:r>
+              <a:rPr lang="en-US" sz="1400" dirty="0">
+                <a:solidFill>
+                  <a:srgbClr val="1F2937"/>
+                </a:solidFill>
+                <a:latin typeface="Calibri" pitchFamily="34" charset="0"/>
+                <a:ea typeface="Calibri" pitchFamily="34" charset="-122"/>
+                <a:cs typeface="Calibri" pitchFamily="34" charset="-120"/>
+              </a:rPr>
+              <a:t>Video walkthrough submitted before the session</a:t>
+            </a:r>
+            <a:endParaRPr lang="en-US" sz="1400" dirty="0"/>
+          </a:p>
           <a:p>
             <a:pPr marL="342900" indent="-342900">
               <a:spcAft>
